--- a/assets/module-4-ml/mod-4-lab-MNIST.pptx
+++ b/assets/module-4-ml/mod-4-lab-MNIST.pptx
@@ -118,6 +118,11 @@
       </a:defRPr>
     </a:lvl9pPr>
   </p:defaultTextStyle>
+  <p:extLst>
+    <p:ext uri="{EFAFB233-063F-42B5-8137-9DF3F51BA10A}">
+      <p15:sldGuideLst xmlns:p15="http://schemas.microsoft.com/office/powerpoint/2012/main"/>
+    </p:ext>
+  </p:extLst>
 </p:presentation>
 </file>
 
@@ -2236,14 +2241,14 @@
             </a:r>
             <a:r>
               <a:rPr lang="en-US" dirty="0"/>
-              <a:t> +x setup.sh (you only need to do this once to give the file permission to run).</a:t>
+              <a:t> +x setup_linux_1.bash (you only need to do this once to give the file permission to run).</a:t>
             </a:r>
           </a:p>
           <a:p>
             <a:pPr lvl="1"/>
             <a:r>
               <a:rPr lang="en-US" dirty="0"/>
-              <a:t>Run it by typing: ./setup_linux.sh</a:t>
+              <a:t>Run it by typing: bash setup_linux_1</a:t>
             </a:r>
           </a:p>
         </p:txBody>
